--- a/templates/CASA_HOJA_A3.pptx
+++ b/templates/CASA_HOJA_A3.pptx
@@ -4245,7 +4245,7 @@
                 </a:solidFill>
                 <a:latin typeface="Calibri"/>
               </a:rPr>
-              <a:t>[Título del tema] · 18/10/2026 · F.Santoro · Rev. A</a:t>
+              <a:t>[Título del tema] · [fecha] · F.Santoro · Rev. [rev.]</a:t>
             </a:r>
           </a:p>
         </p:txBody>
